--- a/test-corpus/word-verification/swimlane.pptx
+++ b/test-corpus/word-verification/swimlane.pptx
@@ -144,8 +144,8 @@
         </p:nvSpPr>
         <p:spPr>
           <a:xfrm>
-            <a:off x="457200" y="2217816"/>
-            <a:ext cx="11277600" cy="1249190"/>
+            <a:off x="457200" y="2780987"/>
+            <a:ext cx="7034784" cy="779224"/>
           </a:xfrm>
           <a:prstGeom prst="rect">
             <a:avLst/>
@@ -171,8 +171,8 @@
         </p:nvSpPr>
         <p:spPr>
           <a:xfrm>
-            <a:off x="457200" y="2217816"/>
-            <a:ext cx="11277600" cy="167489"/>
+            <a:off x="457200" y="2780987"/>
+            <a:ext cx="7034784" cy="104477"/>
           </a:xfrm>
           <a:prstGeom prst="rect">
             <a:avLst/>
@@ -183,7 +183,7 @@
           </a:ln>
         </p:spPr>
         <p:txBody>
-          <a:bodyPr lIns="66996" tIns="33498" rIns="66996" bIns="33498" anchor="ctr" anchorCtr="0"/>
+          <a:bodyPr lIns="41791" tIns="20895" rIns="41791" bIns="20895" anchor="ctr" anchorCtr="0"/>
           <a:lstStyle/>
           <a:p>
             <a:pPr algn="ctr">
@@ -195,7 +195,7 @@
               </a:spcAft>
             </a:pPr>
             <a:r>
-              <a:rPr lang="en-US" sz="900" dirty="0">
+              <a:rPr lang="en-US" sz="550" dirty="0">
                 <a:solidFill>
                   <a:srgbClr val="000000"/>
                 </a:solidFill>
@@ -213,8 +213,8 @@
         </p:nvSpPr>
         <p:spPr>
           <a:xfrm>
-            <a:off x="2589895" y="3439091"/>
-            <a:ext cx="4499874" cy="1772593"/>
+            <a:off x="1787540" y="3542798"/>
+            <a:ext cx="2806948" cy="1105715"/>
           </a:xfrm>
           <a:prstGeom prst="rect">
             <a:avLst/>
@@ -240,8 +240,8 @@
         </p:nvSpPr>
         <p:spPr>
           <a:xfrm>
-            <a:off x="2589895" y="3439091"/>
-            <a:ext cx="4499874" cy="167489"/>
+            <a:off x="1787540" y="3542798"/>
+            <a:ext cx="2806948" cy="104477"/>
           </a:xfrm>
           <a:prstGeom prst="rect">
             <a:avLst/>
@@ -252,7 +252,7 @@
           </a:ln>
         </p:spPr>
         <p:txBody>
-          <a:bodyPr lIns="66996" tIns="33498" rIns="66996" bIns="33498" anchor="ctr" anchorCtr="0"/>
+          <a:bodyPr lIns="41791" tIns="20895" rIns="41791" bIns="20895" anchor="ctr" anchorCtr="0"/>
           <a:lstStyle/>
           <a:p>
             <a:pPr algn="ctr">
@@ -264,7 +264,7 @@
               </a:spcAft>
             </a:pPr>
             <a:r>
-              <a:rPr lang="en-US" sz="900" dirty="0">
+              <a:rPr lang="en-US" sz="550" dirty="0">
                 <a:solidFill>
                   <a:srgbClr val="000000"/>
                 </a:solidFill>
@@ -282,8 +282,8 @@
         </p:nvSpPr>
         <p:spPr>
           <a:xfrm>
-            <a:off x="7648066" y="3700792"/>
-            <a:ext cx="1954040" cy="1249190"/>
+            <a:off x="4942745" y="3706044"/>
+            <a:ext cx="1218898" cy="779224"/>
           </a:xfrm>
           <a:prstGeom prst="rect">
             <a:avLst/>
@@ -309,8 +309,8 @@
         </p:nvSpPr>
         <p:spPr>
           <a:xfrm>
-            <a:off x="7648066" y="3700792"/>
-            <a:ext cx="1954040" cy="167489"/>
+            <a:off x="4942745" y="3706044"/>
+            <a:ext cx="1218898" cy="104477"/>
           </a:xfrm>
           <a:prstGeom prst="rect">
             <a:avLst/>
@@ -321,7 +321,7 @@
           </a:ln>
         </p:spPr>
         <p:txBody>
-          <a:bodyPr lIns="66996" tIns="33498" rIns="66996" bIns="33498" anchor="ctr" anchorCtr="0"/>
+          <a:bodyPr lIns="41791" tIns="20895" rIns="41791" bIns="20895" anchor="ctr" anchorCtr="0"/>
           <a:lstStyle/>
           <a:p>
             <a:pPr algn="ctr">
@@ -333,7 +333,7 @@
               </a:spcAft>
             </a:pPr>
             <a:r>
-              <a:rPr lang="en-US" sz="900" dirty="0">
+              <a:rPr lang="en-US" sz="550" dirty="0">
                 <a:solidFill>
                   <a:srgbClr val="000000"/>
                 </a:solidFill>
@@ -351,8 +351,8 @@
         </p:nvSpPr>
         <p:spPr>
           <a:xfrm>
-            <a:off x="736349" y="2664454"/>
-            <a:ext cx="1295249" cy="523403"/>
+            <a:off x="631328" y="3059592"/>
+            <a:ext cx="807955" cy="326491"/>
           </a:xfrm>
           <a:prstGeom prst="rect">
             <a:avLst/>
@@ -360,7 +360,7 @@
           <a:solidFill>
             <a:srgbClr val="D9E2F3"/>
           </a:solidFill>
-          <a:ln w="9305" cap="flat" cmpd="sng" algn="ctr">
+          <a:ln w="5804" cap="flat" cmpd="sng" algn="ctr">
             <a:solidFill>
               <a:srgbClr val="2F5496"/>
             </a:solidFill>
@@ -384,7 +384,7 @@
           </a:fontRef>
         </p:style>
         <p:txBody>
-          <a:bodyPr rot="0" spcFirstLastPara="0" vertOverflow="overflow" horzOverflow="overflow" vert="horz" wrap="square" lIns="66996" tIns="33498" rIns="66996" bIns="33498" numCol="1" spcCol="0" rtlCol="0" fromWordArt="0" anchor="ctr" anchorCtr="0" forceAA="0" compatLnSpc="1">
+          <a:bodyPr rot="0" spcFirstLastPara="0" vertOverflow="overflow" horzOverflow="overflow" vert="horz" wrap="square" lIns="41791" tIns="20895" rIns="41791" bIns="20895" numCol="1" spcCol="0" rtlCol="0" fromWordArt="0" anchor="ctr" anchorCtr="0" forceAA="0" compatLnSpc="1">
             <a:prstTxWarp prst="textNoShape">
               <a:avLst/>
             </a:prstTxWarp>
@@ -401,7 +401,7 @@
               </a:spcAft>
             </a:pPr>
             <a:r>
-              <a:rPr lang="en-US" sz="900" dirty="0">
+              <a:rPr lang="en-US" sz="550" dirty="0">
                 <a:solidFill>
                   <a:srgbClr val="000000"/>
                 </a:solidFill>
@@ -419,8 +419,8 @@
         </p:nvSpPr>
         <p:spPr>
           <a:xfrm>
-            <a:off x="10160402" y="2664454"/>
-            <a:ext cx="1295249" cy="523403"/>
+            <a:off x="6509900" y="3059592"/>
+            <a:ext cx="807955" cy="326491"/>
           </a:xfrm>
           <a:prstGeom prst="roundRect">
             <a:avLst/>
@@ -428,7 +428,7 @@
           <a:solidFill>
             <a:srgbClr val="D9E2F3"/>
           </a:solidFill>
-          <a:ln w="9305" cap="flat" cmpd="sng" algn="ctr">
+          <a:ln w="5804" cap="flat" cmpd="sng" algn="ctr">
             <a:solidFill>
               <a:srgbClr val="2F5496"/>
             </a:solidFill>
@@ -452,7 +452,7 @@
           </a:fontRef>
         </p:style>
         <p:txBody>
-          <a:bodyPr rot="0" spcFirstLastPara="0" vertOverflow="overflow" horzOverflow="overflow" vert="horz" wrap="square" lIns="66996" tIns="33498" rIns="66996" bIns="33498" numCol="1" spcCol="0" rtlCol="0" fromWordArt="0" anchor="ctr" anchorCtr="0" forceAA="0" compatLnSpc="1">
+          <a:bodyPr rot="0" spcFirstLastPara="0" vertOverflow="overflow" horzOverflow="overflow" vert="horz" wrap="square" lIns="41791" tIns="20895" rIns="41791" bIns="20895" numCol="1" spcCol="0" rtlCol="0" fromWordArt="0" anchor="ctr" anchorCtr="0" forceAA="0" compatLnSpc="1">
             <a:prstTxWarp prst="textNoShape">
               <a:avLst/>
             </a:prstTxWarp>
@@ -469,7 +469,7 @@
               </a:spcAft>
             </a:pPr>
             <a:r>
-              <a:rPr lang="en-US" sz="900" dirty="0">
+              <a:rPr lang="en-US" sz="550" dirty="0">
                 <a:solidFill>
                   <a:srgbClr val="000000"/>
                 </a:solidFill>
@@ -487,8 +487,8 @@
         </p:nvSpPr>
         <p:spPr>
           <a:xfrm>
-            <a:off x="5615865" y="4147430"/>
-            <a:ext cx="1194756" cy="523403"/>
+            <a:off x="3675091" y="3984649"/>
+            <a:ext cx="745269" cy="326491"/>
           </a:xfrm>
           <a:prstGeom prst="rect">
             <a:avLst/>
@@ -496,7 +496,7 @@
           <a:solidFill>
             <a:srgbClr val="D9E2F3"/>
           </a:solidFill>
-          <a:ln w="9305" cap="flat" cmpd="sng" algn="ctr">
+          <a:ln w="5804" cap="flat" cmpd="sng" algn="ctr">
             <a:solidFill>
               <a:srgbClr val="2F5496"/>
             </a:solidFill>
@@ -520,7 +520,7 @@
           </a:fontRef>
         </p:style>
         <p:txBody>
-          <a:bodyPr rot="0" spcFirstLastPara="0" vertOverflow="overflow" horzOverflow="overflow" vert="horz" wrap="square" lIns="66996" tIns="33498" rIns="66996" bIns="33498" numCol="1" spcCol="0" rtlCol="0" fromWordArt="0" anchor="ctr" anchorCtr="0" forceAA="0" compatLnSpc="1">
+          <a:bodyPr rot="0" spcFirstLastPara="0" vertOverflow="overflow" horzOverflow="overflow" vert="horz" wrap="square" lIns="41791" tIns="20895" rIns="41791" bIns="20895" numCol="1" spcCol="0" rtlCol="0" fromWordArt="0" anchor="ctr" anchorCtr="0" forceAA="0" compatLnSpc="1">
             <a:prstTxWarp prst="textNoShape">
               <a:avLst/>
             </a:prstTxWarp>
@@ -537,7 +537,7 @@
               </a:spcAft>
             </a:pPr>
             <a:r>
-              <a:rPr lang="en-US" sz="900" dirty="0">
+              <a:rPr lang="en-US" sz="550" dirty="0">
                 <a:solidFill>
                   <a:srgbClr val="000000"/>
                 </a:solidFill>
@@ -555,8 +555,8 @@
         </p:nvSpPr>
         <p:spPr>
           <a:xfrm>
-            <a:off x="2869043" y="3885728"/>
-            <a:ext cx="2188524" cy="1046807"/>
+            <a:off x="1961669" y="3821404"/>
+            <a:ext cx="1365166" cy="652981"/>
           </a:xfrm>
           <a:prstGeom prst="diamond">
             <a:avLst/>
@@ -564,7 +564,7 @@
           <a:solidFill>
             <a:srgbClr val="D9E2F3"/>
           </a:solidFill>
-          <a:ln w="9305" cap="flat" cmpd="sng" algn="ctr">
+          <a:ln w="5804" cap="flat" cmpd="sng" algn="ctr">
             <a:solidFill>
               <a:srgbClr val="2F5496"/>
             </a:solidFill>
@@ -588,7 +588,7 @@
           </a:fontRef>
         </p:style>
         <p:txBody>
-          <a:bodyPr rot="0" spcFirstLastPara="0" vertOverflow="overflow" horzOverflow="overflow" vert="horz" wrap="square" lIns="66996" tIns="33498" rIns="66996" bIns="33498" numCol="1" spcCol="0" rtlCol="0" fromWordArt="0" anchor="ctr" anchorCtr="0" forceAA="0" compatLnSpc="1">
+          <a:bodyPr rot="0" spcFirstLastPara="0" vertOverflow="overflow" horzOverflow="overflow" vert="horz" wrap="square" lIns="41791" tIns="20895" rIns="41791" bIns="20895" numCol="1" spcCol="0" rtlCol="0" fromWordArt="0" anchor="ctr" anchorCtr="0" forceAA="0" compatLnSpc="1">
             <a:prstTxWarp prst="textNoShape">
               <a:avLst/>
             </a:prstTxWarp>
@@ -605,7 +605,7 @@
               </a:spcAft>
             </a:pPr>
             <a:r>
-              <a:rPr lang="en-US" sz="900" dirty="0">
+              <a:rPr lang="en-US" sz="550" dirty="0">
                 <a:solidFill>
                   <a:srgbClr val="000000"/>
                 </a:solidFill>
@@ -623,8 +623,8 @@
         </p:nvSpPr>
         <p:spPr>
           <a:xfrm>
-            <a:off x="7927214" y="4147430"/>
-            <a:ext cx="1395743" cy="523403"/>
+            <a:off x="5116874" y="3984649"/>
+            <a:ext cx="870642" cy="326491"/>
           </a:xfrm>
           <a:prstGeom prst="roundRect">
             <a:avLst/>
@@ -632,7 +632,7 @@
           <a:solidFill>
             <a:srgbClr val="D9E2F3"/>
           </a:solidFill>
-          <a:ln w="9305" cap="flat" cmpd="sng" algn="ctr">
+          <a:ln w="5804" cap="flat" cmpd="sng" algn="ctr">
             <a:solidFill>
               <a:srgbClr val="2F5496"/>
             </a:solidFill>
@@ -656,7 +656,7 @@
           </a:fontRef>
         </p:style>
         <p:txBody>
-          <a:bodyPr rot="0" spcFirstLastPara="0" vertOverflow="overflow" horzOverflow="overflow" vert="horz" wrap="square" lIns="66996" tIns="33498" rIns="66996" bIns="33498" numCol="1" spcCol="0" rtlCol="0" fromWordArt="0" anchor="ctr" anchorCtr="0" forceAA="0" compatLnSpc="1">
+          <a:bodyPr rot="0" spcFirstLastPara="0" vertOverflow="overflow" horzOverflow="overflow" vert="horz" wrap="square" lIns="41791" tIns="20895" rIns="41791" bIns="20895" numCol="1" spcCol="0" rtlCol="0" fromWordArt="0" anchor="ctr" anchorCtr="0" forceAA="0" compatLnSpc="1">
             <a:prstTxWarp prst="textNoShape">
               <a:avLst/>
             </a:prstTxWarp>
@@ -673,7 +673,7 @@
               </a:spcAft>
             </a:pPr>
             <a:r>
-              <a:rPr lang="en-US" sz="900" dirty="0">
+              <a:rPr lang="en-US" sz="550" dirty="0">
                 <a:solidFill>
                   <a:srgbClr val="000000"/>
                 </a:solidFill>
@@ -694,13 +694,13 @@
         </p:nvCxnSpPr>
         <p:spPr>
           <a:xfrm>
-            <a:off x="2031598" y="2926155"/>
-            <a:ext cx="837445" cy="1482977"/>
+            <a:off x="1439284" y="3222838"/>
+            <a:ext cx="522385" cy="925056"/>
           </a:xfrm>
           <a:prstGeom prst="line">
             <a:avLst/>
           </a:prstGeom>
-          <a:ln w="9305" cap="flat" cmpd="sng" algn="ctr">
+          <a:ln w="5804" cap="flat" cmpd="sng" algn="ctr">
             <a:solidFill>
               <a:srgbClr val="2F5496"/>
             </a:solidFill>
@@ -734,13 +734,13 @@
         </p:nvCxnSpPr>
         <p:spPr>
           <a:xfrm>
-            <a:off x="5057568" y="4409132"/>
-            <a:ext cx="558297" cy="0"/>
+            <a:off x="3326835" y="4147894"/>
+            <a:ext cx="348256" cy="0"/>
           </a:xfrm>
           <a:prstGeom prst="line">
             <a:avLst/>
           </a:prstGeom>
-          <a:ln w="9305" cap="flat" cmpd="sng" algn="ctr">
+          <a:ln w="5804" cap="flat" cmpd="sng" algn="ctr">
             <a:solidFill>
               <a:srgbClr val="2F5496"/>
             </a:solidFill>
@@ -771,8 +771,8 @@
         </p:nvSpPr>
         <p:spPr>
           <a:xfrm>
-            <a:off x="5153595" y="4325387"/>
-            <a:ext cx="366243" cy="167489"/>
+            <a:off x="3386735" y="4095656"/>
+            <a:ext cx="228456" cy="104477"/>
           </a:xfrm>
           <a:prstGeom prst="rect">
             <a:avLst/>
@@ -785,7 +785,7 @@
           </a:ln>
         </p:spPr>
         <p:txBody>
-          <a:bodyPr rot="0" vert="horz" wrap="none" lIns="27915" tIns="0" rIns="27915" bIns="0" anchor="ctr" anchorCtr="1">
+          <a:bodyPr rot="0" vert="horz" wrap="none" lIns="17413" tIns="0" rIns="17413" bIns="0" anchor="ctr" anchorCtr="1">
             <a:noAutofit/>
           </a:bodyPr>
           <a:lstStyle/>
@@ -799,7 +799,7 @@
               </a:spcAft>
             </a:pPr>
             <a:r>
-              <a:rPr lang="en-US" sz="600" dirty="0">
+              <a:rPr lang="en-US" sz="350" dirty="0">
                 <a:solidFill>
                   <a:srgbClr val="000000"/>
                 </a:solidFill>
@@ -820,13 +820,13 @@
         </p:nvCxnSpPr>
         <p:spPr>
           <a:xfrm flipH="1" flipV="1">
-            <a:off x="2031598" y="2926155"/>
-            <a:ext cx="837445" cy="1482977"/>
+            <a:off x="1439284" y="3222838"/>
+            <a:ext cx="522385" cy="925056"/>
           </a:xfrm>
           <a:prstGeom prst="line">
             <a:avLst/>
           </a:prstGeom>
-          <a:ln w="9305" cap="flat" cmpd="sng" algn="ctr">
+          <a:ln w="5804" cap="flat" cmpd="sng" algn="ctr">
             <a:solidFill>
               <a:srgbClr val="2F5496"/>
             </a:solidFill>
@@ -857,8 +857,8 @@
         </p:nvSpPr>
         <p:spPr>
           <a:xfrm>
-            <a:off x="2296789" y="3583899"/>
-            <a:ext cx="307063" cy="167489"/>
+            <a:off x="1604706" y="3633127"/>
+            <a:ext cx="191541" cy="104477"/>
           </a:xfrm>
           <a:prstGeom prst="rect">
             <a:avLst/>
@@ -871,7 +871,7 @@
           </a:ln>
         </p:spPr>
         <p:txBody>
-          <a:bodyPr rot="0" vert="horz" wrap="none" lIns="27915" tIns="0" rIns="27915" bIns="0" anchor="ctr" anchorCtr="1">
+          <a:bodyPr rot="0" vert="horz" wrap="none" lIns="17413" tIns="0" rIns="17413" bIns="0" anchor="ctr" anchorCtr="1">
             <a:noAutofit/>
           </a:bodyPr>
           <a:lstStyle/>
@@ -885,7 +885,7 @@
               </a:spcAft>
             </a:pPr>
             <a:r>
-              <a:rPr lang="en-US" sz="600" dirty="0">
+              <a:rPr lang="en-US" sz="350" dirty="0">
                 <a:solidFill>
                   <a:srgbClr val="000000"/>
                 </a:solidFill>
@@ -906,13 +906,13 @@
         </p:nvCxnSpPr>
         <p:spPr>
           <a:xfrm>
-            <a:off x="6810620" y="4409132"/>
-            <a:ext cx="1116594" cy="0"/>
+            <a:off x="4420360" y="4147894"/>
+            <a:ext cx="696514" cy="0"/>
           </a:xfrm>
           <a:prstGeom prst="line">
             <a:avLst/>
           </a:prstGeom>
-          <a:ln w="9305" cap="flat" cmpd="sng" algn="ctr">
+          <a:ln w="5804" cap="flat" cmpd="sng" algn="ctr">
             <a:solidFill>
               <a:srgbClr val="2F5496"/>
             </a:solidFill>
@@ -946,13 +946,13 @@
         </p:nvCxnSpPr>
         <p:spPr>
           <a:xfrm flipV="1">
-            <a:off x="9322957" y="2926155"/>
-            <a:ext cx="837445" cy="1482977"/>
+            <a:off x="5987515" y="3222838"/>
+            <a:ext cx="522385" cy="925056"/>
           </a:xfrm>
           <a:prstGeom prst="line">
             <a:avLst/>
           </a:prstGeom>
-          <a:ln w="9305" cap="flat" cmpd="sng" algn="ctr">
+          <a:ln w="5804" cap="flat" cmpd="sng" algn="ctr">
             <a:solidFill>
               <a:srgbClr val="2F5496"/>
             </a:solidFill>
@@ -975,6 +975,260 @@
           </a:fontRef>
         </p:style>
       </p:cxnSp>
+      <p:sp>
+        <p:nvSpPr>
+          <p:cNvPr id="4" name="Mermaid source"/>
+          <p:cNvSpPr/>
+          <p:nvPr/>
+        </p:nvSpPr>
+        <p:spPr>
+          <a:xfrm>
+            <a:off x="7674864" y="1028700"/>
+            <a:ext cx="4059936" cy="5372100"/>
+          </a:xfrm>
+          <a:prstGeom prst="rect">
+            <a:avLst/>
+          </a:prstGeom>
+          <a:solidFill>
+            <a:srgbClr val="F3F4F6"/>
+          </a:solidFill>
+          <a:ln w="9525">
+            <a:solidFill>
+              <a:srgbClr val="D1D5DB"/>
+            </a:solidFill>
+          </a:ln>
+        </p:spPr>
+        <p:txBody>
+          <a:bodyPr wrap="square" lIns="91440" tIns="45720" rIns="91440" bIns="45720" anchor="t">
+            <a:noAutofit/>
+          </a:bodyPr>
+          <a:lstStyle/>
+          <a:p>
+            <a:pPr algn="l"/>
+            <a:r>
+              <a:rPr lang="en-US" sz="1400" dirty="0">
+                <a:solidFill>
+                  <a:srgbClr val="1F2937"/>
+                </a:solidFill>
+                <a:latin typeface="Consolas"/>
+                <a:cs typeface="Consolas"/>
+              </a:rPr>
+              <a:t>swimlane-beta LR</a:t>
+            </a:r>
+          </a:p>
+          <a:p>
+            <a:pPr algn="l"/>
+            <a:r>
+              <a:rPr lang="en-US" sz="1400" dirty="0">
+                <a:solidFill>
+                  <a:srgbClr val="1F2937"/>
+                </a:solidFill>
+                <a:latin typeface="Consolas"/>
+                <a:cs typeface="Consolas"/>
+              </a:rPr>
+              <a:t>  subgraph Customer[Customer]</a:t>
+            </a:r>
+          </a:p>
+          <a:p>
+            <a:pPr algn="l"/>
+            <a:r>
+              <a:rPr lang="en-US" sz="1400" dirty="0">
+                <a:solidFill>
+                  <a:srgbClr val="1F2937"/>
+                </a:solidFill>
+                <a:latin typeface="Consolas"/>
+                <a:cs typeface="Consolas"/>
+              </a:rPr>
+              <a:t>    Order[Place order]</a:t>
+            </a:r>
+          </a:p>
+          <a:p>
+            <a:pPr algn="l"/>
+            <a:r>
+              <a:rPr lang="en-US" sz="1400" dirty="0">
+                <a:solidFill>
+                  <a:srgbClr val="1F2937"/>
+                </a:solidFill>
+                <a:latin typeface="Consolas"/>
+                <a:cs typeface="Consolas"/>
+              </a:rPr>
+              <a:t>    Pay(Pay invoice)</a:t>
+            </a:r>
+          </a:p>
+          <a:p>
+            <a:pPr algn="l"/>
+            <a:r>
+              <a:rPr lang="en-US" sz="1400" dirty="0">
+                <a:solidFill>
+                  <a:srgbClr val="1F2937"/>
+                </a:solidFill>
+                <a:latin typeface="Consolas"/>
+                <a:cs typeface="Consolas"/>
+              </a:rPr>
+              <a:t>  end</a:t>
+            </a:r>
+          </a:p>
+          <a:p>
+            <a:pPr algn="l"/>
+            <a:r>
+              <a:rPr lang="en-US" sz="1400" dirty="0">
+                <a:solidFill>
+                  <a:srgbClr val="1F2937"/>
+                </a:solidFill>
+                <a:latin typeface="Consolas"/>
+                <a:cs typeface="Consolas"/>
+              </a:rPr>
+              <a:t>  subgraph Store[Store]</a:t>
+            </a:r>
+          </a:p>
+          <a:p>
+            <a:pPr algn="l"/>
+            <a:r>
+              <a:rPr lang="en-US" sz="1400" dirty="0">
+                <a:solidFill>
+                  <a:srgbClr val="1F2937"/>
+                </a:solidFill>
+                <a:latin typeface="Consolas"/>
+                <a:cs typeface="Consolas"/>
+              </a:rPr>
+              <a:t>    Pack[Pack items]</a:t>
+            </a:r>
+          </a:p>
+          <a:p>
+            <a:pPr algn="l"/>
+            <a:r>
+              <a:rPr lang="en-US" sz="1400" dirty="0">
+                <a:solidFill>
+                  <a:srgbClr val="1F2937"/>
+                </a:solidFill>
+                <a:latin typeface="Consolas"/>
+                <a:cs typeface="Consolas"/>
+              </a:rPr>
+              <a:t>    Decision{In stock?}</a:t>
+            </a:r>
+          </a:p>
+          <a:p>
+            <a:pPr algn="l"/>
+            <a:r>
+              <a:rPr lang="en-US" sz="1400" dirty="0">
+                <a:solidFill>
+                  <a:srgbClr val="1F2937"/>
+                </a:solidFill>
+                <a:latin typeface="Consolas"/>
+                <a:cs typeface="Consolas"/>
+              </a:rPr>
+              <a:t>  end</a:t>
+            </a:r>
+          </a:p>
+          <a:p>
+            <a:pPr algn="l"/>
+            <a:r>
+              <a:rPr lang="en-US" sz="1400" dirty="0">
+                <a:solidFill>
+                  <a:srgbClr val="1F2937"/>
+                </a:solidFill>
+                <a:latin typeface="Consolas"/>
+                <a:cs typeface="Consolas"/>
+              </a:rPr>
+              <a:t>  subgraph Carrier[Carrier]</a:t>
+            </a:r>
+          </a:p>
+          <a:p>
+            <a:pPr algn="l"/>
+            <a:r>
+              <a:rPr lang="en-US" sz="1400" dirty="0">
+                <a:solidFill>
+                  <a:srgbClr val="1F2937"/>
+                </a:solidFill>
+                <a:latin typeface="Consolas"/>
+                <a:cs typeface="Consolas"/>
+              </a:rPr>
+              <a:t>    Ship([Ship package])</a:t>
+            </a:r>
+          </a:p>
+          <a:p>
+            <a:pPr algn="l"/>
+            <a:r>
+              <a:rPr lang="en-US" sz="1400" dirty="0">
+                <a:solidFill>
+                  <a:srgbClr val="1F2937"/>
+                </a:solidFill>
+                <a:latin typeface="Consolas"/>
+                <a:cs typeface="Consolas"/>
+              </a:rPr>
+              <a:t>  end</a:t>
+            </a:r>
+          </a:p>
+          <a:p>
+            <a:endParaRPr lang="en-US" sz="1400" dirty="0"/>
+          </a:p>
+          <a:p>
+            <a:pPr algn="l"/>
+            <a:r>
+              <a:rPr lang="en-US" sz="1400" dirty="0">
+                <a:solidFill>
+                  <a:srgbClr val="1F2937"/>
+                </a:solidFill>
+                <a:latin typeface="Consolas"/>
+                <a:cs typeface="Consolas"/>
+              </a:rPr>
+              <a:t>  Order --&gt; Decision</a:t>
+            </a:r>
+          </a:p>
+          <a:p>
+            <a:pPr algn="l"/>
+            <a:r>
+              <a:rPr lang="en-US" sz="1400" dirty="0">
+                <a:solidFill>
+                  <a:srgbClr val="1F2937"/>
+                </a:solidFill>
+                <a:latin typeface="Consolas"/>
+                <a:cs typeface="Consolas"/>
+              </a:rPr>
+              <a:t>  Decision --&gt;|Yes| Pack</a:t>
+            </a:r>
+          </a:p>
+          <a:p>
+            <a:pPr algn="l"/>
+            <a:r>
+              <a:rPr lang="en-US" sz="1400" dirty="0">
+                <a:solidFill>
+                  <a:srgbClr val="1F2937"/>
+                </a:solidFill>
+                <a:latin typeface="Consolas"/>
+                <a:cs typeface="Consolas"/>
+              </a:rPr>
+              <a:t>  Decision --&gt;|No| Order</a:t>
+            </a:r>
+          </a:p>
+          <a:p>
+            <a:pPr algn="l"/>
+            <a:r>
+              <a:rPr lang="en-US" sz="1400" dirty="0">
+                <a:solidFill>
+                  <a:srgbClr val="1F2937"/>
+                </a:solidFill>
+                <a:latin typeface="Consolas"/>
+                <a:cs typeface="Consolas"/>
+              </a:rPr>
+              <a:t>  Pack --&gt; Ship</a:t>
+            </a:r>
+          </a:p>
+          <a:p>
+            <a:pPr algn="l"/>
+            <a:r>
+              <a:rPr lang="en-US" sz="1400" dirty="0">
+                <a:solidFill>
+                  <a:srgbClr val="1F2937"/>
+                </a:solidFill>
+                <a:latin typeface="Consolas"/>
+                <a:cs typeface="Consolas"/>
+              </a:rPr>
+              <a:t>  Ship --&gt; Pay</a:t>
+            </a:r>
+          </a:p>
+        </p:txBody>
+      </p:sp>
     </p:spTree>
   </p:cSld>
   <p:clrMapOvr>
